--- a/CSCI250-Fall2026/content/Week17_Evaluation-Safety-Finals/slides.pptx
+++ b/CSCI250-Fall2026/content/Week17_Evaluation-Safety-Finals/slides.pptx
@@ -4118,7 +4118,7 @@
                 </a:solidFill>
                 <a:latin typeface="Calibri"/>
               </a:rPr>
-              <a:t>Final Project — Due Dec 19, 11:59 PM PT</a:t>
+              <a:t>Final Project (Capstone M5) — Due Dec 19, 11:59 PM PST</a:t>
             </a:r>
           </a:p>
         </p:txBody>
@@ -4157,7 +4157,7 @@
                 </a:solidFill>
                 <a:latin typeface="Calibri"/>
               </a:rPr>
-              <a:t>• Working notebook/app: a runnable GenAI pipeline (keys via Secrets)</a:t>
+              <a:t>• Deployed PUBLIC demo: Gradio on HF Spaces or a Colab notebook (free tier)</a:t>
             </a:r>
           </a:p>
           <a:p>
@@ -4173,7 +4173,7 @@
                 </a:solidFill>
                 <a:latin typeface="Calibri"/>
               </a:rPr>
-              <a:t>• Eval results: run your harness, report the score</a:t>
+              <a:t>• GitHub repo + README: banner, setup, scorecard, model reflection, limits</a:t>
             </a:r>
           </a:p>
           <a:p>
@@ -4189,7 +4189,7 @@
                 </a:solidFill>
                 <a:latin typeface="Calibri"/>
               </a:rPr>
-              <a:t>• 1-2 page write-up incl. a safety note</a:t>
+              <a:t>• Eval results: baseline vs. final from your harness</a:t>
             </a:r>
           </a:p>
           <a:p>
@@ -4205,7 +4205,7 @@
                 </a:solidFill>
                 <a:latin typeface="Calibri"/>
               </a:rPr>
-              <a:t>• 5-minute recorded demo posted to Canvas</a:t>
+              <a:t>• 3-minute recorded screencast</a:t>
             </a:r>
           </a:p>
           <a:p>
@@ -4467,7 +4467,7 @@
                 </a:solidFill>
                 <a:latin typeface="Calibri"/>
               </a:rPr>
-              <a:t>✓ Finish + record your Final Project demo</a:t>
+              <a:t>✓ Deploy your public demo + record the 3-minute screencast</a:t>
             </a:r>
           </a:p>
           <a:p>
@@ -4483,7 +4483,7 @@
                 </a:solidFill>
                 <a:latin typeface="Calibri"/>
               </a:rPr>
-              <a:t>✓ Submit the Final Project by Fri Dec 19, 11:59 PM PT</a:t>
+              <a:t>✓ Submit the Final Project (M5) by Fri Dec 19, 11:59 PM PST</a:t>
             </a:r>
           </a:p>
           <a:p>
@@ -4837,7 +4837,7 @@
                 </a:solidFill>
                 <a:latin typeface="Calibri"/>
               </a:rPr>
-              <a:t>– Final Project due Friday, Dec 19, 11:59 PM PT</a:t>
+              <a:t>– Final Project due Friday, Dec 19, 11:59 PM PST</a:t>
             </a:r>
           </a:p>
         </p:txBody>
@@ -6072,7 +6072,7 @@
                 </a:solidFill>
                 <a:latin typeface="Consolas"/>
               </a:rPr>
-              <a:t>    model='claude-sonnet-4-6', max_tokens=10,</a:t>
+              <a:t>    model='claude-sonnet-4-6', max_tokens=10, temperature=0,</a:t>
             </a:r>
           </a:p>
           <a:p>

--- a/CSCI250-Fall2026/content/Week17_Evaluation-Safety-Finals/slides.pptx
+++ b/CSCI250-Fall2026/content/Week17_Evaluation-Safety-Finals/slides.pptx
@@ -20,6 +20,8 @@
     <p:sldId id="268" r:id="rId19"/>
     <p:sldId id="269" r:id="rId20"/>
     <p:sldId id="270" r:id="rId21"/>
+    <p:sldId id="271" r:id="rId22"/>
+    <p:sldId id="272" r:id="rId23"/>
   </p:sldIdLst>
   <p:sldSz cx="12191695" cy="6858000" type="screen4x3"/>
   <p:notesSz cx="6858000" cy="9144000"/>
@@ -3238,7 +3240,7 @@
     <p:bg>
       <p:bgPr>
         <a:solidFill>
-          <a:srgbClr val="128C8C"/>
+          <a:srgbClr val="FFFFFF"/>
         </a:solidFill>
         <a:effectLst/>
       </p:bgPr>
@@ -3252,14 +3254,102 @@
       <p:grpSpPr/>
       <p:sp>
         <p:nvSpPr>
-          <p:cNvPr id="2" name="TextBox 1"/>
+          <p:cNvPr id="2" name="Rectangle 1"/>
+          <p:cNvSpPr/>
+          <p:nvPr/>
+        </p:nvSpPr>
+        <p:spPr>
+          <a:xfrm>
+            <a:off x="0" y="0"/>
+            <a:ext cx="12191695" cy="1051560"/>
+          </a:xfrm>
+          <a:prstGeom prst="rect">
+            <a:avLst/>
+          </a:prstGeom>
+          <a:solidFill>
+            <a:srgbClr val="0B1F3A"/>
+          </a:solidFill>
+          <a:ln>
+            <a:noFill/>
+          </a:ln>
+          <a:effectLst/>
+        </p:spPr>
+        <p:style>
+          <a:lnRef idx="1">
+            <a:schemeClr val="accent1"/>
+          </a:lnRef>
+          <a:fillRef idx="3">
+            <a:schemeClr val="accent1"/>
+          </a:fillRef>
+          <a:effectRef idx="2">
+            <a:schemeClr val="accent1"/>
+          </a:effectRef>
+          <a:fontRef idx="minor">
+            <a:schemeClr val="lt1"/>
+          </a:fontRef>
+        </p:style>
+        <p:txBody>
+          <a:bodyPr rtlCol="0" anchor="ctr"/>
+          <a:lstStyle/>
+          <a:p>
+            <a:pPr algn="ctr"/>
+          </a:p>
+        </p:txBody>
+      </p:sp>
+      <p:sp>
+        <p:nvSpPr>
+          <p:cNvPr id="3" name="Rectangle 2"/>
+          <p:cNvSpPr/>
+          <p:nvPr/>
+        </p:nvSpPr>
+        <p:spPr>
+          <a:xfrm>
+            <a:off x="0" y="1051560"/>
+            <a:ext cx="12191695" cy="54864"/>
+          </a:xfrm>
+          <a:prstGeom prst="rect">
+            <a:avLst/>
+          </a:prstGeom>
+          <a:solidFill>
+            <a:srgbClr val="128C8C"/>
+          </a:solidFill>
+          <a:ln>
+            <a:noFill/>
+          </a:ln>
+          <a:effectLst/>
+        </p:spPr>
+        <p:style>
+          <a:lnRef idx="1">
+            <a:schemeClr val="accent1"/>
+          </a:lnRef>
+          <a:fillRef idx="3">
+            <a:schemeClr val="accent1"/>
+          </a:fillRef>
+          <a:effectRef idx="2">
+            <a:schemeClr val="accent1"/>
+          </a:effectRef>
+          <a:fontRef idx="minor">
+            <a:schemeClr val="lt1"/>
+          </a:fontRef>
+        </p:style>
+        <p:txBody>
+          <a:bodyPr rtlCol="0" anchor="ctr"/>
+          <a:lstStyle/>
+          <a:p>
+            <a:pPr algn="ctr"/>
+          </a:p>
+        </p:txBody>
+      </p:sp>
+      <p:sp>
+        <p:nvSpPr>
+          <p:cNvPr id="4" name="TextBox 3"/>
           <p:cNvSpPr txBox="1"/>
           <p:nvPr/>
         </p:nvSpPr>
         <p:spPr>
           <a:xfrm>
-            <a:off x="822960" y="2743200"/>
-            <a:ext cx="10515600" cy="1371600"/>
+            <a:off x="548640" y="201168"/>
+            <a:ext cx="11064240" cy="731520"/>
           </a:xfrm>
           <a:prstGeom prst="rect">
             <a:avLst/>
@@ -3274,13 +3364,259 @@
           <a:p>
             <a:pPr algn="l"/>
             <a:r>
-              <a:rPr sz="3600" b="1">
+              <a:rPr sz="2800" b="1">
                 <a:solidFill>
                   <a:srgbClr val="FFFFFF"/>
                 </a:solidFill>
                 <a:latin typeface="Calibri"/>
               </a:rPr>
-              <a:t>GenAI Safety</a:t>
+              <a:t>It's Just Cases + Scorer + Average</a:t>
+            </a:r>
+          </a:p>
+        </p:txBody>
+      </p:sp>
+      <p:sp>
+        <p:nvSpPr>
+          <p:cNvPr id="5" name="Rectangle 4"/>
+          <p:cNvSpPr/>
+          <p:nvPr/>
+        </p:nvSpPr>
+        <p:spPr>
+          <a:xfrm>
+            <a:off x="548640" y="1325880"/>
+            <a:ext cx="11064240" cy="4480560"/>
+          </a:xfrm>
+          <a:prstGeom prst="rect">
+            <a:avLst/>
+          </a:prstGeom>
+          <a:solidFill>
+            <a:srgbClr val="1E1E1E"/>
+          </a:solidFill>
+          <a:ln>
+            <a:noFill/>
+          </a:ln>
+          <a:effectLst/>
+        </p:spPr>
+        <p:style>
+          <a:lnRef idx="1">
+            <a:schemeClr val="accent1"/>
+          </a:lnRef>
+          <a:fillRef idx="3">
+            <a:schemeClr val="accent1"/>
+          </a:fillRef>
+          <a:effectRef idx="2">
+            <a:schemeClr val="accent1"/>
+          </a:effectRef>
+          <a:fontRef idx="minor">
+            <a:schemeClr val="lt1"/>
+          </a:fontRef>
+        </p:style>
+        <p:txBody>
+          <a:bodyPr rtlCol="0" anchor="ctr" wrap="square" lIns="182880" tIns="137160"/>
+          <a:lstStyle/>
+          <a:p>
+            <a:pPr algn="ctr"/>
+            <a:r>
+              <a:rPr sz="1500">
+                <a:solidFill>
+                  <a:srgbClr val="E6E6E6"/>
+                </a:solidFill>
+                <a:latin typeface="Consolas"/>
+              </a:rPr>
+              <a:t>test_cases = [</a:t>
+            </a:r>
+          </a:p>
+          <a:p>
+            <a:r>
+              <a:rPr sz="1500">
+                <a:solidFill>
+                  <a:srgbClr val="E6E6E6"/>
+                </a:solidFill>
+                <a:latin typeface="Consolas"/>
+              </a:rPr>
+              <a:t>    {'input': 'Capital of France?', 'expected': 'Paris'},</a:t>
+            </a:r>
+          </a:p>
+          <a:p>
+            <a:r>
+              <a:rPr sz="1500">
+                <a:solidFill>
+                  <a:srgbClr val="E6E6E6"/>
+                </a:solidFill>
+                <a:latin typeface="Consolas"/>
+              </a:rPr>
+              <a:t>    {'input': '2 + 2?',            'expected': '4'},</a:t>
+            </a:r>
+          </a:p>
+          <a:p>
+            <a:r>
+              <a:rPr sz="1500">
+                <a:solidFill>
+                  <a:srgbClr val="E6E6E6"/>
+                </a:solidFill>
+                <a:latin typeface="Consolas"/>
+              </a:rPr>
+              <a:t>]</a:t>
+            </a:r>
+          </a:p>
+          <a:p>
+            <a:r>
+              <a:rPr sz="1500">
+                <a:solidFill>
+                  <a:srgbClr val="E6E6E6"/>
+                </a:solidFill>
+                <a:latin typeface="Consolas"/>
+              </a:rPr>
+              <a:t> </a:t>
+            </a:r>
+          </a:p>
+          <a:p>
+            <a:r>
+              <a:rPr sz="1500">
+                <a:solidFill>
+                  <a:srgbClr val="E6E6E6"/>
+                </a:solidFill>
+                <a:latin typeface="Consolas"/>
+              </a:rPr>
+              <a:t>def run_eval(system_fn, score_fn):</a:t>
+            </a:r>
+          </a:p>
+          <a:p>
+            <a:r>
+              <a:rPr sz="1500">
+                <a:solidFill>
+                  <a:srgbClr val="E6E6E6"/>
+                </a:solidFill>
+                <a:latin typeface="Consolas"/>
+              </a:rPr>
+              <a:t>    scores = [score_fn(system_fn(tc['input']), tc['expected'])</a:t>
+            </a:r>
+          </a:p>
+          <a:p>
+            <a:r>
+              <a:rPr sz="1500">
+                <a:solidFill>
+                  <a:srgbClr val="E6E6E6"/>
+                </a:solidFill>
+                <a:latin typeface="Consolas"/>
+              </a:rPr>
+              <a:t>              for tc in test_cases]</a:t>
+            </a:r>
+          </a:p>
+          <a:p>
+            <a:r>
+              <a:rPr sz="1500">
+                <a:solidFill>
+                  <a:srgbClr val="E6E6E6"/>
+                </a:solidFill>
+                <a:latin typeface="Consolas"/>
+              </a:rPr>
+              <a:t>    return sum(scores) / len(scores)   # average score</a:t>
+            </a:r>
+          </a:p>
+        </p:txBody>
+      </p:sp>
+      <p:sp>
+        <p:nvSpPr>
+          <p:cNvPr id="6" name="TextBox 5"/>
+          <p:cNvSpPr txBox="1"/>
+          <p:nvPr/>
+        </p:nvSpPr>
+        <p:spPr>
+          <a:xfrm>
+            <a:off x="548640" y="5897880"/>
+            <a:ext cx="10515600" cy="457200"/>
+          </a:xfrm>
+          <a:prstGeom prst="rect">
+            <a:avLst/>
+          </a:prstGeom>
+          <a:noFill/>
+        </p:spPr>
+        <p:txBody>
+          <a:bodyPr wrap="square">
+            <a:spAutoFit/>
+          </a:bodyPr>
+          <a:lstStyle/>
+          <a:p>
+            <a:pPr algn="l"/>
+            <a:r>
+              <a:rPr sz="1400" b="0">
+                <a:solidFill>
+                  <a:srgbClr val="6B7280"/>
+                </a:solidFill>
+                <a:latin typeface="Calibri"/>
+              </a:rPr>
+              <a:t>Keep it in version control; full LLM-judge version in the notebook</a:t>
+            </a:r>
+          </a:p>
+        </p:txBody>
+      </p:sp>
+      <p:sp>
+        <p:nvSpPr>
+          <p:cNvPr id="7" name="TextBox 6"/>
+          <p:cNvSpPr txBox="1"/>
+          <p:nvPr/>
+        </p:nvSpPr>
+        <p:spPr>
+          <a:xfrm>
+            <a:off x="365760" y="6446520"/>
+            <a:ext cx="8229600" cy="365760"/>
+          </a:xfrm>
+          <a:prstGeom prst="rect">
+            <a:avLst/>
+          </a:prstGeom>
+          <a:noFill/>
+        </p:spPr>
+        <p:txBody>
+          <a:bodyPr wrap="square">
+            <a:spAutoFit/>
+          </a:bodyPr>
+          <a:lstStyle/>
+          <a:p>
+            <a:pPr algn="l"/>
+            <a:r>
+              <a:rPr sz="1000" b="0">
+                <a:solidFill>
+                  <a:srgbClr val="6B7280"/>
+                </a:solidFill>
+                <a:latin typeface="Calibri"/>
+              </a:rPr>
+              <a:t>Palomar College · CSCI 250 · Fall 2026</a:t>
+            </a:r>
+          </a:p>
+        </p:txBody>
+      </p:sp>
+      <p:sp>
+        <p:nvSpPr>
+          <p:cNvPr id="8" name="TextBox 7"/>
+          <p:cNvSpPr txBox="1"/>
+          <p:nvPr/>
+        </p:nvSpPr>
+        <p:spPr>
+          <a:xfrm>
+            <a:off x="11155680" y="6446520"/>
+            <a:ext cx="822960" cy="365760"/>
+          </a:xfrm>
+          <a:prstGeom prst="rect">
+            <a:avLst/>
+          </a:prstGeom>
+          <a:noFill/>
+        </p:spPr>
+        <p:txBody>
+          <a:bodyPr wrap="square">
+            <a:spAutoFit/>
+          </a:bodyPr>
+          <a:lstStyle/>
+          <a:p>
+            <a:pPr algn="r"/>
+            <a:r>
+              <a:rPr sz="1000" b="0">
+                <a:solidFill>
+                  <a:srgbClr val="6B7280"/>
+                </a:solidFill>
+                <a:latin typeface="Calibri"/>
+              </a:rPr>
+              <a:t>10/17</a:t>
             </a:r>
           </a:p>
         </p:txBody>
@@ -3299,7 +3635,7 @@
     <p:bg>
       <p:bgPr>
         <a:solidFill>
-          <a:srgbClr val="FFFFFF"/>
+          <a:srgbClr val="128C8C"/>
         </a:solidFill>
         <a:effectLst/>
       </p:bgPr>
@@ -3313,102 +3649,14 @@
       <p:grpSpPr/>
       <p:sp>
         <p:nvSpPr>
-          <p:cNvPr id="2" name="Rectangle 1"/>
-          <p:cNvSpPr/>
-          <p:nvPr/>
-        </p:nvSpPr>
-        <p:spPr>
-          <a:xfrm>
-            <a:off x="0" y="0"/>
-            <a:ext cx="12191695" cy="1051560"/>
-          </a:xfrm>
-          <a:prstGeom prst="rect">
-            <a:avLst/>
-          </a:prstGeom>
-          <a:solidFill>
-            <a:srgbClr val="0B1F3A"/>
-          </a:solidFill>
-          <a:ln>
-            <a:noFill/>
-          </a:ln>
-          <a:effectLst/>
-        </p:spPr>
-        <p:style>
-          <a:lnRef idx="1">
-            <a:schemeClr val="accent1"/>
-          </a:lnRef>
-          <a:fillRef idx="3">
-            <a:schemeClr val="accent1"/>
-          </a:fillRef>
-          <a:effectRef idx="2">
-            <a:schemeClr val="accent1"/>
-          </a:effectRef>
-          <a:fontRef idx="minor">
-            <a:schemeClr val="lt1"/>
-          </a:fontRef>
-        </p:style>
-        <p:txBody>
-          <a:bodyPr rtlCol="0" anchor="ctr"/>
-          <a:lstStyle/>
-          <a:p>
-            <a:pPr algn="ctr"/>
-          </a:p>
-        </p:txBody>
-      </p:sp>
-      <p:sp>
-        <p:nvSpPr>
-          <p:cNvPr id="3" name="Rectangle 2"/>
-          <p:cNvSpPr/>
-          <p:nvPr/>
-        </p:nvSpPr>
-        <p:spPr>
-          <a:xfrm>
-            <a:off x="0" y="1051560"/>
-            <a:ext cx="12191695" cy="54864"/>
-          </a:xfrm>
-          <a:prstGeom prst="rect">
-            <a:avLst/>
-          </a:prstGeom>
-          <a:solidFill>
-            <a:srgbClr val="128C8C"/>
-          </a:solidFill>
-          <a:ln>
-            <a:noFill/>
-          </a:ln>
-          <a:effectLst/>
-        </p:spPr>
-        <p:style>
-          <a:lnRef idx="1">
-            <a:schemeClr val="accent1"/>
-          </a:lnRef>
-          <a:fillRef idx="3">
-            <a:schemeClr val="accent1"/>
-          </a:fillRef>
-          <a:effectRef idx="2">
-            <a:schemeClr val="accent1"/>
-          </a:effectRef>
-          <a:fontRef idx="minor">
-            <a:schemeClr val="lt1"/>
-          </a:fontRef>
-        </p:style>
-        <p:txBody>
-          <a:bodyPr rtlCol="0" anchor="ctr"/>
-          <a:lstStyle/>
-          <a:p>
-            <a:pPr algn="ctr"/>
-          </a:p>
-        </p:txBody>
-      </p:sp>
-      <p:sp>
-        <p:nvSpPr>
-          <p:cNvPr id="4" name="TextBox 3"/>
+          <p:cNvPr id="2" name="TextBox 1"/>
           <p:cNvSpPr txBox="1"/>
           <p:nvPr/>
         </p:nvSpPr>
         <p:spPr>
           <a:xfrm>
-            <a:off x="548640" y="201168"/>
-            <a:ext cx="11064240" cy="731520"/>
+            <a:off x="822960" y="2743200"/>
+            <a:ext cx="10515600" cy="1371600"/>
           </a:xfrm>
           <a:prstGeom prst="rect">
             <a:avLst/>
@@ -3423,186 +3671,13 @@
           <a:p>
             <a:pPr algn="l"/>
             <a:r>
-              <a:rPr sz="2800" b="1">
+              <a:rPr sz="3600" b="1">
                 <a:solidFill>
                   <a:srgbClr val="FFFFFF"/>
                 </a:solidFill>
                 <a:latin typeface="Calibri"/>
               </a:rPr>
-              <a:t>Know the Failure Modes</a:t>
-            </a:r>
-          </a:p>
-        </p:txBody>
-      </p:sp>
-      <p:sp>
-        <p:nvSpPr>
-          <p:cNvPr id="5" name="TextBox 4"/>
-          <p:cNvSpPr txBox="1"/>
-          <p:nvPr/>
-        </p:nvSpPr>
-        <p:spPr>
-          <a:xfrm>
-            <a:off x="731520" y="1371600"/>
-            <a:ext cx="10698480" cy="4754880"/>
-          </a:xfrm>
-          <a:prstGeom prst="rect">
-            <a:avLst/>
-          </a:prstGeom>
-          <a:noFill/>
-        </p:spPr>
-        <p:txBody>
-          <a:bodyPr wrap="square">
-            <a:spAutoFit/>
-          </a:bodyPr>
-          <a:lstStyle/>
-          <a:p>
-            <a:pPr>
-              <a:spcAft>
-                <a:spcPts val="800"/>
-              </a:spcAft>
-            </a:pPr>
-            <a:r>
-              <a:rPr sz="2000">
-                <a:solidFill>
-                  <a:srgbClr val="1A1A1A"/>
-                </a:solidFill>
-                <a:latin typeface="Calibri"/>
-              </a:rPr>
-              <a:t>• Hallucination: confident falsehoods → ground w/ RAG, cite, verify</a:t>
-            </a:r>
-          </a:p>
-          <a:p>
-            <a:pPr>
-              <a:spcAft>
-                <a:spcPts val="800"/>
-              </a:spcAft>
-            </a:pPr>
-            <a:r>
-              <a:rPr sz="2000">
-                <a:solidFill>
-                  <a:srgbClr val="1A1A1A"/>
-                </a:solidFill>
-                <a:latin typeface="Calibri"/>
-              </a:rPr>
-              <a:t>• Bias: unfair across groups → test diverse inputs, human in loop</a:t>
-            </a:r>
-          </a:p>
-          <a:p>
-            <a:pPr>
-              <a:spcAft>
-                <a:spcPts val="800"/>
-              </a:spcAft>
-            </a:pPr>
-            <a:r>
-              <a:rPr sz="2000">
-                <a:solidFill>
-                  <a:srgbClr val="1A1A1A"/>
-                </a:solidFill>
-                <a:latin typeface="Calibri"/>
-              </a:rPr>
-              <a:t>• Prompt injection: untrusted text hijacks system → separate data/instructions</a:t>
-            </a:r>
-          </a:p>
-          <a:p>
-            <a:pPr>
-              <a:spcAft>
-                <a:spcPts val="800"/>
-              </a:spcAft>
-            </a:pPr>
-            <a:r>
-              <a:rPr sz="2000">
-                <a:solidFill>
-                  <a:srgbClr val="1A1A1A"/>
-                </a:solidFill>
-                <a:latin typeface="Calibri"/>
-              </a:rPr>
-              <a:t>• Privacy/IP: don't send secrets/PII; respect copyright; disclose AI media</a:t>
-            </a:r>
-          </a:p>
-          <a:p>
-            <a:pPr lvl="1">
-              <a:spcAft>
-                <a:spcPts val="800"/>
-              </a:spcAft>
-            </a:pPr>
-            <a:r>
-              <a:rPr sz="1800">
-                <a:solidFill>
-                  <a:srgbClr val="6B7280"/>
-                </a:solidFill>
-                <a:latin typeface="Calibri"/>
-              </a:rPr>
-              <a:t>– Limits: LLMs predict plausible text, not truth — keep humans accountable</a:t>
-            </a:r>
-          </a:p>
-        </p:txBody>
-      </p:sp>
-      <p:sp>
-        <p:nvSpPr>
-          <p:cNvPr id="6" name="TextBox 5"/>
-          <p:cNvSpPr txBox="1"/>
-          <p:nvPr/>
-        </p:nvSpPr>
-        <p:spPr>
-          <a:xfrm>
-            <a:off x="365760" y="6446520"/>
-            <a:ext cx="8229600" cy="365760"/>
-          </a:xfrm>
-          <a:prstGeom prst="rect">
-            <a:avLst/>
-          </a:prstGeom>
-          <a:noFill/>
-        </p:spPr>
-        <p:txBody>
-          <a:bodyPr wrap="square">
-            <a:spAutoFit/>
-          </a:bodyPr>
-          <a:lstStyle/>
-          <a:p>
-            <a:pPr algn="l"/>
-            <a:r>
-              <a:rPr sz="1000" b="0">
-                <a:solidFill>
-                  <a:srgbClr val="6B7280"/>
-                </a:solidFill>
-                <a:latin typeface="Calibri"/>
-              </a:rPr>
-              <a:t>Palomar College · CSCI 250 · Fall 2026</a:t>
-            </a:r>
-          </a:p>
-        </p:txBody>
-      </p:sp>
-      <p:sp>
-        <p:nvSpPr>
-          <p:cNvPr id="7" name="TextBox 6"/>
-          <p:cNvSpPr txBox="1"/>
-          <p:nvPr/>
-        </p:nvSpPr>
-        <p:spPr>
-          <a:xfrm>
-            <a:off x="11155680" y="6446520"/>
-            <a:ext cx="822960" cy="365760"/>
-          </a:xfrm>
-          <a:prstGeom prst="rect">
-            <a:avLst/>
-          </a:prstGeom>
-          <a:noFill/>
-        </p:spPr>
-        <p:txBody>
-          <a:bodyPr wrap="square">
-            <a:spAutoFit/>
-          </a:bodyPr>
-          <a:lstStyle/>
-          <a:p>
-            <a:pPr algn="r"/>
-            <a:r>
-              <a:rPr sz="1000" b="0">
-                <a:solidFill>
-                  <a:srgbClr val="6B7280"/>
-                </a:solidFill>
-                <a:latin typeface="Calibri"/>
-              </a:rPr>
-              <a:t>11/15</a:t>
+              <a:t>GenAI Safety</a:t>
             </a:r>
           </a:p>
         </p:txBody>
@@ -3751,7 +3826,7 @@
                 </a:solidFill>
                 <a:latin typeface="Calibri"/>
               </a:rPr>
-              <a:t>Prompt Injection — Defend</a:t>
+              <a:t>Know the Failure Modes</a:t>
             </a:r>
           </a:p>
         </p:txBody>
@@ -3790,7 +3865,7 @@
                 </a:solidFill>
                 <a:latin typeface="Calibri"/>
               </a:rPr>
-              <a:t>• Separate TRUSTED instructions from UNTRUSTED data</a:t>
+              <a:t>• Hallucination: confident falsehoods → ground w/ RAG, cite, verify</a:t>
             </a:r>
           </a:p>
           <a:p>
@@ -3806,7 +3881,7 @@
                 </a:solidFill>
                 <a:latin typeface="Calibri"/>
               </a:rPr>
-              <a:t>• Never blindly eval/exec model output</a:t>
+              <a:t>• Bias: unfair across groups → test diverse inputs, human in loop</a:t>
             </a:r>
           </a:p>
           <a:p>
@@ -3822,7 +3897,7 @@
                 </a:solidFill>
                 <a:latin typeface="Calibri"/>
               </a:rPr>
-              <a:t>• Constrain tools &amp; permissions; least privilege</a:t>
+              <a:t>• Prompt injection: untrusted text hijacks system → separate data/instructions</a:t>
             </a:r>
           </a:p>
           <a:p>
@@ -3838,7 +3913,23 @@
                 </a:solidFill>
                 <a:latin typeface="Calibri"/>
               </a:rPr>
-              <a:t>• Validate outputs before acting on them</a:t>
+              <a:t>• Privacy/IP: don't send secrets/PII; respect copyright; disclose AI media</a:t>
+            </a:r>
+          </a:p>
+          <a:p>
+            <a:pPr lvl="1">
+              <a:spcAft>
+                <a:spcPts val="800"/>
+              </a:spcAft>
+            </a:pPr>
+            <a:r>
+              <a:rPr sz="1800">
+                <a:solidFill>
+                  <a:srgbClr val="6B7280"/>
+                </a:solidFill>
+                <a:latin typeface="Calibri"/>
+              </a:rPr>
+              <a:t>– Limits: LLMs predict plausible text, not truth — keep humans accountable</a:t>
             </a:r>
           </a:p>
         </p:txBody>
@@ -3908,7 +3999,7 @@
                 </a:solidFill>
                 <a:latin typeface="Calibri"/>
               </a:rPr>
-              <a:t>12/15</a:t>
+              <a:t>12/17</a:t>
             </a:r>
           </a:p>
         </p:txBody>
@@ -3927,7 +4018,7 @@
     <p:bg>
       <p:bgPr>
         <a:solidFill>
-          <a:srgbClr val="128C8C"/>
+          <a:srgbClr val="FFFFFF"/>
         </a:solidFill>
         <a:effectLst/>
       </p:bgPr>
@@ -3941,14 +4032,102 @@
       <p:grpSpPr/>
       <p:sp>
         <p:nvSpPr>
-          <p:cNvPr id="2" name="TextBox 1"/>
+          <p:cNvPr id="2" name="Rectangle 1"/>
+          <p:cNvSpPr/>
+          <p:nvPr/>
+        </p:nvSpPr>
+        <p:spPr>
+          <a:xfrm>
+            <a:off x="0" y="0"/>
+            <a:ext cx="12191695" cy="1051560"/>
+          </a:xfrm>
+          <a:prstGeom prst="rect">
+            <a:avLst/>
+          </a:prstGeom>
+          <a:solidFill>
+            <a:srgbClr val="0B1F3A"/>
+          </a:solidFill>
+          <a:ln>
+            <a:noFill/>
+          </a:ln>
+          <a:effectLst/>
+        </p:spPr>
+        <p:style>
+          <a:lnRef idx="1">
+            <a:schemeClr val="accent1"/>
+          </a:lnRef>
+          <a:fillRef idx="3">
+            <a:schemeClr val="accent1"/>
+          </a:fillRef>
+          <a:effectRef idx="2">
+            <a:schemeClr val="accent1"/>
+          </a:effectRef>
+          <a:fontRef idx="minor">
+            <a:schemeClr val="lt1"/>
+          </a:fontRef>
+        </p:style>
+        <p:txBody>
+          <a:bodyPr rtlCol="0" anchor="ctr"/>
+          <a:lstStyle/>
+          <a:p>
+            <a:pPr algn="ctr"/>
+          </a:p>
+        </p:txBody>
+      </p:sp>
+      <p:sp>
+        <p:nvSpPr>
+          <p:cNvPr id="3" name="Rectangle 2"/>
+          <p:cNvSpPr/>
+          <p:nvPr/>
+        </p:nvSpPr>
+        <p:spPr>
+          <a:xfrm>
+            <a:off x="0" y="1051560"/>
+            <a:ext cx="12191695" cy="54864"/>
+          </a:xfrm>
+          <a:prstGeom prst="rect">
+            <a:avLst/>
+          </a:prstGeom>
+          <a:solidFill>
+            <a:srgbClr val="128C8C"/>
+          </a:solidFill>
+          <a:ln>
+            <a:noFill/>
+          </a:ln>
+          <a:effectLst/>
+        </p:spPr>
+        <p:style>
+          <a:lnRef idx="1">
+            <a:schemeClr val="accent1"/>
+          </a:lnRef>
+          <a:fillRef idx="3">
+            <a:schemeClr val="accent1"/>
+          </a:fillRef>
+          <a:effectRef idx="2">
+            <a:schemeClr val="accent1"/>
+          </a:effectRef>
+          <a:fontRef idx="minor">
+            <a:schemeClr val="lt1"/>
+          </a:fontRef>
+        </p:style>
+        <p:txBody>
+          <a:bodyPr rtlCol="0" anchor="ctr"/>
+          <a:lstStyle/>
+          <a:p>
+            <a:pPr algn="ctr"/>
+          </a:p>
+        </p:txBody>
+      </p:sp>
+      <p:sp>
+        <p:nvSpPr>
+          <p:cNvPr id="4" name="TextBox 3"/>
           <p:cNvSpPr txBox="1"/>
           <p:nvPr/>
         </p:nvSpPr>
         <p:spPr>
           <a:xfrm>
-            <a:off x="822960" y="2743200"/>
-            <a:ext cx="10515600" cy="1371600"/>
+            <a:off x="548640" y="201168"/>
+            <a:ext cx="11064240" cy="731520"/>
           </a:xfrm>
           <a:prstGeom prst="rect">
             <a:avLst/>
@@ -3963,13 +4142,170 @@
           <a:p>
             <a:pPr algn="l"/>
             <a:r>
-              <a:rPr sz="3600" b="1">
+              <a:rPr sz="2800" b="1">
                 <a:solidFill>
                   <a:srgbClr val="FFFFFF"/>
                 </a:solidFill>
                 <a:latin typeface="Calibri"/>
               </a:rPr>
-              <a:t>Wrap-Up &amp; Final Project</a:t>
+              <a:t>Prompt Injection — Defend</a:t>
+            </a:r>
+          </a:p>
+        </p:txBody>
+      </p:sp>
+      <p:sp>
+        <p:nvSpPr>
+          <p:cNvPr id="5" name="TextBox 4"/>
+          <p:cNvSpPr txBox="1"/>
+          <p:nvPr/>
+        </p:nvSpPr>
+        <p:spPr>
+          <a:xfrm>
+            <a:off x="731520" y="1371600"/>
+            <a:ext cx="10698480" cy="4754880"/>
+          </a:xfrm>
+          <a:prstGeom prst="rect">
+            <a:avLst/>
+          </a:prstGeom>
+          <a:noFill/>
+        </p:spPr>
+        <p:txBody>
+          <a:bodyPr wrap="square">
+            <a:spAutoFit/>
+          </a:bodyPr>
+          <a:lstStyle/>
+          <a:p>
+            <a:pPr>
+              <a:spcAft>
+                <a:spcPts val="800"/>
+              </a:spcAft>
+            </a:pPr>
+            <a:r>
+              <a:rPr sz="2000">
+                <a:solidFill>
+                  <a:srgbClr val="1A1A1A"/>
+                </a:solidFill>
+                <a:latin typeface="Calibri"/>
+              </a:rPr>
+              <a:t>• Separate TRUSTED instructions from UNTRUSTED data</a:t>
+            </a:r>
+          </a:p>
+          <a:p>
+            <a:pPr>
+              <a:spcAft>
+                <a:spcPts val="800"/>
+              </a:spcAft>
+            </a:pPr>
+            <a:r>
+              <a:rPr sz="2000">
+                <a:solidFill>
+                  <a:srgbClr val="1A1A1A"/>
+                </a:solidFill>
+                <a:latin typeface="Calibri"/>
+              </a:rPr>
+              <a:t>• Never blindly eval/exec model output</a:t>
+            </a:r>
+          </a:p>
+          <a:p>
+            <a:pPr>
+              <a:spcAft>
+                <a:spcPts val="800"/>
+              </a:spcAft>
+            </a:pPr>
+            <a:r>
+              <a:rPr sz="2000">
+                <a:solidFill>
+                  <a:srgbClr val="1A1A1A"/>
+                </a:solidFill>
+                <a:latin typeface="Calibri"/>
+              </a:rPr>
+              <a:t>• Constrain tools &amp; permissions; least privilege</a:t>
+            </a:r>
+          </a:p>
+          <a:p>
+            <a:pPr>
+              <a:spcAft>
+                <a:spcPts val="800"/>
+              </a:spcAft>
+            </a:pPr>
+            <a:r>
+              <a:rPr sz="2000">
+                <a:solidFill>
+                  <a:srgbClr val="1A1A1A"/>
+                </a:solidFill>
+                <a:latin typeface="Calibri"/>
+              </a:rPr>
+              <a:t>• Validate outputs before acting on them</a:t>
+            </a:r>
+          </a:p>
+        </p:txBody>
+      </p:sp>
+      <p:sp>
+        <p:nvSpPr>
+          <p:cNvPr id="6" name="TextBox 5"/>
+          <p:cNvSpPr txBox="1"/>
+          <p:nvPr/>
+        </p:nvSpPr>
+        <p:spPr>
+          <a:xfrm>
+            <a:off x="365760" y="6446520"/>
+            <a:ext cx="8229600" cy="365760"/>
+          </a:xfrm>
+          <a:prstGeom prst="rect">
+            <a:avLst/>
+          </a:prstGeom>
+          <a:noFill/>
+        </p:spPr>
+        <p:txBody>
+          <a:bodyPr wrap="square">
+            <a:spAutoFit/>
+          </a:bodyPr>
+          <a:lstStyle/>
+          <a:p>
+            <a:pPr algn="l"/>
+            <a:r>
+              <a:rPr sz="1000" b="0">
+                <a:solidFill>
+                  <a:srgbClr val="6B7280"/>
+                </a:solidFill>
+                <a:latin typeface="Calibri"/>
+              </a:rPr>
+              <a:t>Palomar College · CSCI 250 · Fall 2026</a:t>
+            </a:r>
+          </a:p>
+        </p:txBody>
+      </p:sp>
+      <p:sp>
+        <p:nvSpPr>
+          <p:cNvPr id="7" name="TextBox 6"/>
+          <p:cNvSpPr txBox="1"/>
+          <p:nvPr/>
+        </p:nvSpPr>
+        <p:spPr>
+          <a:xfrm>
+            <a:off x="11155680" y="6446520"/>
+            <a:ext cx="822960" cy="365760"/>
+          </a:xfrm>
+          <a:prstGeom prst="rect">
+            <a:avLst/>
+          </a:prstGeom>
+          <a:noFill/>
+        </p:spPr>
+        <p:txBody>
+          <a:bodyPr wrap="square">
+            <a:spAutoFit/>
+          </a:bodyPr>
+          <a:lstStyle/>
+          <a:p>
+            <a:pPr algn="r"/>
+            <a:r>
+              <a:rPr sz="1000" b="0">
+                <a:solidFill>
+                  <a:srgbClr val="6B7280"/>
+                </a:solidFill>
+                <a:latin typeface="Calibri"/>
+              </a:rPr>
+              <a:t>13/17</a:t>
             </a:r>
           </a:p>
         </p:txBody>
@@ -4118,7 +4454,7 @@
                 </a:solidFill>
                 <a:latin typeface="Calibri"/>
               </a:rPr>
-              <a:t>Final Project (Capstone M5) — Due Dec 19, 11:59 PM PST</a:t>
+              <a:t>Responsible AI — A Design Requirement</a:t>
             </a:r>
           </a:p>
         </p:txBody>
@@ -4131,8 +4467,43 @@
         </p:nvSpPr>
         <p:spPr>
           <a:xfrm>
-            <a:off x="731520" y="1371600"/>
-            <a:ext cx="10698480" cy="4754880"/>
+            <a:off x="731520" y="1280160"/>
+            <a:ext cx="5120640" cy="548640"/>
+          </a:xfrm>
+          <a:prstGeom prst="rect">
+            <a:avLst/>
+          </a:prstGeom>
+          <a:noFill/>
+        </p:spPr>
+        <p:txBody>
+          <a:bodyPr wrap="square">
+            <a:spAutoFit/>
+          </a:bodyPr>
+          <a:lstStyle/>
+          <a:p>
+            <a:pPr algn="l"/>
+            <a:r>
+              <a:rPr sz="2000" b="1">
+                <a:solidFill>
+                  <a:srgbClr val="128C8C"/>
+                </a:solidFill>
+                <a:latin typeface="Calibri"/>
+              </a:rPr>
+              <a:t>People</a:t>
+            </a:r>
+          </a:p>
+        </p:txBody>
+      </p:sp>
+      <p:sp>
+        <p:nvSpPr>
+          <p:cNvPr id="6" name="TextBox 5"/>
+          <p:cNvSpPr txBox="1"/>
+          <p:nvPr/>
+        </p:nvSpPr>
+        <p:spPr>
+          <a:xfrm>
+            <a:off x="731520" y="1828800"/>
+            <a:ext cx="5120640" cy="4206240"/>
           </a:xfrm>
           <a:prstGeom prst="rect">
             <a:avLst/>
@@ -4151,13 +4522,13 @@
               </a:spcAft>
             </a:pPr>
             <a:r>
-              <a:rPr sz="2000">
+              <a:rPr sz="1800">
                 <a:solidFill>
                   <a:srgbClr val="1A1A1A"/>
                 </a:solidFill>
                 <a:latin typeface="Calibri"/>
               </a:rPr>
-              <a:t>• Deployed PUBLIC demo: Gradio on HF Spaces or a Colab notebook (free tier)</a:t>
+              <a:t>• Bias &amp; fairness: test per-group, human in loop</a:t>
             </a:r>
           </a:p>
           <a:p>
@@ -4167,13 +4538,13 @@
               </a:spcAft>
             </a:pPr>
             <a:r>
-              <a:rPr sz="2000">
+              <a:rPr sz="1800">
                 <a:solidFill>
                   <a:srgbClr val="1A1A1A"/>
                 </a:solidFill>
                 <a:latin typeface="Calibri"/>
               </a:rPr>
-              <a:t>• GitHub repo + README: banner, setup, scorecard, model reflection, limits</a:t>
+              <a:t>• Privacy/PII: redact, retain less, check terms</a:t>
             </a:r>
           </a:p>
           <a:p>
@@ -4183,15 +4554,73 @@
               </a:spcAft>
             </a:pPr>
             <a:r>
-              <a:rPr sz="2000">
+              <a:rPr sz="1800">
                 <a:solidFill>
                   <a:srgbClr val="1A1A1A"/>
                 </a:solidFill>
                 <a:latin typeface="Calibri"/>
               </a:rPr>
-              <a:t>• Eval results: baseline vs. final from your harness</a:t>
-            </a:r>
-          </a:p>
+              <a:t>• Transparency: disclose AI, label media, cite</a:t>
+            </a:r>
+          </a:p>
+        </p:txBody>
+      </p:sp>
+      <p:sp>
+        <p:nvSpPr>
+          <p:cNvPr id="7" name="TextBox 6"/>
+          <p:cNvSpPr txBox="1"/>
+          <p:nvPr/>
+        </p:nvSpPr>
+        <p:spPr>
+          <a:xfrm>
+            <a:off x="6309360" y="1280160"/>
+            <a:ext cx="5120640" cy="548640"/>
+          </a:xfrm>
+          <a:prstGeom prst="rect">
+            <a:avLst/>
+          </a:prstGeom>
+          <a:noFill/>
+        </p:spPr>
+        <p:txBody>
+          <a:bodyPr wrap="square">
+            <a:spAutoFit/>
+          </a:bodyPr>
+          <a:lstStyle/>
+          <a:p>
+            <a:pPr algn="l"/>
+            <a:r>
+              <a:rPr sz="2000" b="1">
+                <a:solidFill>
+                  <a:srgbClr val="128C8C"/>
+                </a:solidFill>
+                <a:latin typeface="Calibri"/>
+              </a:rPr>
+              <a:t>The world</a:t>
+            </a:r>
+          </a:p>
+        </p:txBody>
+      </p:sp>
+      <p:sp>
+        <p:nvSpPr>
+          <p:cNvPr id="8" name="TextBox 7"/>
+          <p:cNvSpPr txBox="1"/>
+          <p:nvPr/>
+        </p:nvSpPr>
+        <p:spPr>
+          <a:xfrm>
+            <a:off x="6309360" y="1828800"/>
+            <a:ext cx="5120640" cy="4206240"/>
+          </a:xfrm>
+          <a:prstGeom prst="rect">
+            <a:avLst/>
+          </a:prstGeom>
+          <a:noFill/>
+        </p:spPr>
+        <p:txBody>
+          <a:bodyPr wrap="square">
+            <a:spAutoFit/>
+          </a:bodyPr>
+          <a:lstStyle/>
           <a:p>
             <a:pPr>
               <a:spcAft>
@@ -4199,17 +4628,17 @@
               </a:spcAft>
             </a:pPr>
             <a:r>
-              <a:rPr sz="2000">
+              <a:rPr sz="1800">
                 <a:solidFill>
                   <a:srgbClr val="1A1A1A"/>
                 </a:solidFill>
                 <a:latin typeface="Calibri"/>
               </a:rPr>
-              <a:t>• 3-minute recorded screencast</a:t>
-            </a:r>
-          </a:p>
-          <a:p>
-            <a:pPr lvl="1">
+              <a:t>• Jobs: augment, keep accountability</a:t>
+            </a:r>
+          </a:p>
+          <a:p>
+            <a:pPr>
               <a:spcAft>
                 <a:spcPts val="800"/>
               </a:spcAft>
@@ -4217,18 +4646,34 @@
             <a:r>
               <a:rPr sz="1800">
                 <a:solidFill>
-                  <a:srgbClr val="6B7280"/>
-                </a:solidFill>
-                <a:latin typeface="Calibri"/>
-              </a:rPr>
-              <a:t>– AI-Use note (required, as all semester)</a:t>
-            </a:r>
-          </a:p>
-        </p:txBody>
-      </p:sp>
-      <p:sp>
-        <p:nvSpPr>
-          <p:cNvPr id="6" name="TextBox 5"/>
+                  <a:srgbClr val="1A1A1A"/>
+                </a:solidFill>
+                <a:latin typeface="Calibri"/>
+              </a:rPr>
+              <a:t>• Misinformation: persuasive fakes at scale</a:t>
+            </a:r>
+          </a:p>
+          <a:p>
+            <a:pPr>
+              <a:spcAft>
+                <a:spcPts val="800"/>
+              </a:spcAft>
+            </a:pPr>
+            <a:r>
+              <a:rPr sz="1800">
+                <a:solidFill>
+                  <a:srgbClr val="1A1A1A"/>
+                </a:solidFill>
+                <a:latin typeface="Calibri"/>
+              </a:rPr>
+              <a:t>• Environmental cost: smallest sufficient model</a:t>
+            </a:r>
+          </a:p>
+        </p:txBody>
+      </p:sp>
+      <p:sp>
+        <p:nvSpPr>
+          <p:cNvPr id="9" name="TextBox 8"/>
           <p:cNvSpPr txBox="1"/>
           <p:nvPr/>
         </p:nvSpPr>
@@ -4263,7 +4708,7 @@
       </p:sp>
       <p:sp>
         <p:nvSpPr>
-          <p:cNvPr id="7" name="TextBox 6"/>
+          <p:cNvPr id="10" name="TextBox 9"/>
           <p:cNvSpPr txBox="1"/>
           <p:nvPr/>
         </p:nvSpPr>
@@ -4291,7 +4736,7 @@
                 </a:solidFill>
                 <a:latin typeface="Calibri"/>
               </a:rPr>
-              <a:t>14/15</a:t>
+              <a:t>14/17</a:t>
             </a:r>
           </a:p>
         </p:txBody>
@@ -4305,6 +4750,389 @@
 </file>
 
 <file path=ppt/slides/slide15.xml><?xml version="1.0" encoding="utf-8"?>
+<p:sld xmlns:a="http://schemas.openxmlformats.org/drawingml/2006/main" xmlns:p="http://schemas.openxmlformats.org/presentationml/2006/main" xmlns:r="http://schemas.openxmlformats.org/officeDocument/2006/relationships">
+  <p:cSld>
+    <p:bg>
+      <p:bgPr>
+        <a:solidFill>
+          <a:srgbClr val="128C8C"/>
+        </a:solidFill>
+        <a:effectLst/>
+      </p:bgPr>
+    </p:bg>
+    <p:spTree>
+      <p:nvGrpSpPr>
+        <p:cNvPr id="1" name=""/>
+        <p:cNvGrpSpPr/>
+        <p:nvPr/>
+      </p:nvGrpSpPr>
+      <p:grpSpPr/>
+      <p:sp>
+        <p:nvSpPr>
+          <p:cNvPr id="2" name="TextBox 1"/>
+          <p:cNvSpPr txBox="1"/>
+          <p:nvPr/>
+        </p:nvSpPr>
+        <p:spPr>
+          <a:xfrm>
+            <a:off x="822960" y="2743200"/>
+            <a:ext cx="10515600" cy="1371600"/>
+          </a:xfrm>
+          <a:prstGeom prst="rect">
+            <a:avLst/>
+          </a:prstGeom>
+          <a:noFill/>
+        </p:spPr>
+        <p:txBody>
+          <a:bodyPr wrap="square" anchor="ctr">
+            <a:spAutoFit/>
+          </a:bodyPr>
+          <a:lstStyle/>
+          <a:p>
+            <a:pPr algn="l"/>
+            <a:r>
+              <a:rPr sz="3600" b="1">
+                <a:solidFill>
+                  <a:srgbClr val="FFFFFF"/>
+                </a:solidFill>
+                <a:latin typeface="Calibri"/>
+              </a:rPr>
+              <a:t>Wrap-Up &amp; Final Project</a:t>
+            </a:r>
+          </a:p>
+        </p:txBody>
+      </p:sp>
+    </p:spTree>
+  </p:cSld>
+  <p:clrMapOvr>
+    <a:masterClrMapping/>
+  </p:clrMapOvr>
+</p:sld>
+</file>
+
+<file path=ppt/slides/slide16.xml><?xml version="1.0" encoding="utf-8"?>
+<p:sld xmlns:a="http://schemas.openxmlformats.org/drawingml/2006/main" xmlns:p="http://schemas.openxmlformats.org/presentationml/2006/main" xmlns:r="http://schemas.openxmlformats.org/officeDocument/2006/relationships">
+  <p:cSld>
+    <p:bg>
+      <p:bgPr>
+        <a:solidFill>
+          <a:srgbClr val="FFFFFF"/>
+        </a:solidFill>
+        <a:effectLst/>
+      </p:bgPr>
+    </p:bg>
+    <p:spTree>
+      <p:nvGrpSpPr>
+        <p:cNvPr id="1" name=""/>
+        <p:cNvGrpSpPr/>
+        <p:nvPr/>
+      </p:nvGrpSpPr>
+      <p:grpSpPr/>
+      <p:sp>
+        <p:nvSpPr>
+          <p:cNvPr id="2" name="Rectangle 1"/>
+          <p:cNvSpPr/>
+          <p:nvPr/>
+        </p:nvSpPr>
+        <p:spPr>
+          <a:xfrm>
+            <a:off x="0" y="0"/>
+            <a:ext cx="12191695" cy="1051560"/>
+          </a:xfrm>
+          <a:prstGeom prst="rect">
+            <a:avLst/>
+          </a:prstGeom>
+          <a:solidFill>
+            <a:srgbClr val="0B1F3A"/>
+          </a:solidFill>
+          <a:ln>
+            <a:noFill/>
+          </a:ln>
+          <a:effectLst/>
+        </p:spPr>
+        <p:style>
+          <a:lnRef idx="1">
+            <a:schemeClr val="accent1"/>
+          </a:lnRef>
+          <a:fillRef idx="3">
+            <a:schemeClr val="accent1"/>
+          </a:fillRef>
+          <a:effectRef idx="2">
+            <a:schemeClr val="accent1"/>
+          </a:effectRef>
+          <a:fontRef idx="minor">
+            <a:schemeClr val="lt1"/>
+          </a:fontRef>
+        </p:style>
+        <p:txBody>
+          <a:bodyPr rtlCol="0" anchor="ctr"/>
+          <a:lstStyle/>
+          <a:p>
+            <a:pPr algn="ctr"/>
+          </a:p>
+        </p:txBody>
+      </p:sp>
+      <p:sp>
+        <p:nvSpPr>
+          <p:cNvPr id="3" name="Rectangle 2"/>
+          <p:cNvSpPr/>
+          <p:nvPr/>
+        </p:nvSpPr>
+        <p:spPr>
+          <a:xfrm>
+            <a:off x="0" y="1051560"/>
+            <a:ext cx="12191695" cy="54864"/>
+          </a:xfrm>
+          <a:prstGeom prst="rect">
+            <a:avLst/>
+          </a:prstGeom>
+          <a:solidFill>
+            <a:srgbClr val="128C8C"/>
+          </a:solidFill>
+          <a:ln>
+            <a:noFill/>
+          </a:ln>
+          <a:effectLst/>
+        </p:spPr>
+        <p:style>
+          <a:lnRef idx="1">
+            <a:schemeClr val="accent1"/>
+          </a:lnRef>
+          <a:fillRef idx="3">
+            <a:schemeClr val="accent1"/>
+          </a:fillRef>
+          <a:effectRef idx="2">
+            <a:schemeClr val="accent1"/>
+          </a:effectRef>
+          <a:fontRef idx="minor">
+            <a:schemeClr val="lt1"/>
+          </a:fontRef>
+        </p:style>
+        <p:txBody>
+          <a:bodyPr rtlCol="0" anchor="ctr"/>
+          <a:lstStyle/>
+          <a:p>
+            <a:pPr algn="ctr"/>
+          </a:p>
+        </p:txBody>
+      </p:sp>
+      <p:sp>
+        <p:nvSpPr>
+          <p:cNvPr id="4" name="TextBox 3"/>
+          <p:cNvSpPr txBox="1"/>
+          <p:nvPr/>
+        </p:nvSpPr>
+        <p:spPr>
+          <a:xfrm>
+            <a:off x="548640" y="201168"/>
+            <a:ext cx="11064240" cy="731520"/>
+          </a:xfrm>
+          <a:prstGeom prst="rect">
+            <a:avLst/>
+          </a:prstGeom>
+          <a:noFill/>
+        </p:spPr>
+        <p:txBody>
+          <a:bodyPr wrap="square" anchor="ctr">
+            <a:spAutoFit/>
+          </a:bodyPr>
+          <a:lstStyle/>
+          <a:p>
+            <a:pPr algn="l"/>
+            <a:r>
+              <a:rPr sz="2800" b="1">
+                <a:solidFill>
+                  <a:srgbClr val="FFFFFF"/>
+                </a:solidFill>
+                <a:latin typeface="Calibri"/>
+              </a:rPr>
+              <a:t>Final Project (Capstone M5) — Due Dec 19, 11:59 PM PST</a:t>
+            </a:r>
+          </a:p>
+        </p:txBody>
+      </p:sp>
+      <p:sp>
+        <p:nvSpPr>
+          <p:cNvPr id="5" name="TextBox 4"/>
+          <p:cNvSpPr txBox="1"/>
+          <p:nvPr/>
+        </p:nvSpPr>
+        <p:spPr>
+          <a:xfrm>
+            <a:off x="731520" y="1371600"/>
+            <a:ext cx="10698480" cy="4754880"/>
+          </a:xfrm>
+          <a:prstGeom prst="rect">
+            <a:avLst/>
+          </a:prstGeom>
+          <a:noFill/>
+        </p:spPr>
+        <p:txBody>
+          <a:bodyPr wrap="square">
+            <a:spAutoFit/>
+          </a:bodyPr>
+          <a:lstStyle/>
+          <a:p>
+            <a:pPr>
+              <a:spcAft>
+                <a:spcPts val="800"/>
+              </a:spcAft>
+            </a:pPr>
+            <a:r>
+              <a:rPr sz="2000">
+                <a:solidFill>
+                  <a:srgbClr val="1A1A1A"/>
+                </a:solidFill>
+                <a:latin typeface="Calibri"/>
+              </a:rPr>
+              <a:t>• Deployed PUBLIC demo: Gradio on HF Spaces or a Colab notebook (free tier)</a:t>
+            </a:r>
+          </a:p>
+          <a:p>
+            <a:pPr>
+              <a:spcAft>
+                <a:spcPts val="800"/>
+              </a:spcAft>
+            </a:pPr>
+            <a:r>
+              <a:rPr sz="2000">
+                <a:solidFill>
+                  <a:srgbClr val="1A1A1A"/>
+                </a:solidFill>
+                <a:latin typeface="Calibri"/>
+              </a:rPr>
+              <a:t>• GitHub repo + README: banner, setup, scorecard, model reflection, limits</a:t>
+            </a:r>
+          </a:p>
+          <a:p>
+            <a:pPr>
+              <a:spcAft>
+                <a:spcPts val="800"/>
+              </a:spcAft>
+            </a:pPr>
+            <a:r>
+              <a:rPr sz="2000">
+                <a:solidFill>
+                  <a:srgbClr val="1A1A1A"/>
+                </a:solidFill>
+                <a:latin typeface="Calibri"/>
+              </a:rPr>
+              <a:t>• Eval results: baseline vs. final from your harness</a:t>
+            </a:r>
+          </a:p>
+          <a:p>
+            <a:pPr>
+              <a:spcAft>
+                <a:spcPts val="800"/>
+              </a:spcAft>
+            </a:pPr>
+            <a:r>
+              <a:rPr sz="2000">
+                <a:solidFill>
+                  <a:srgbClr val="1A1A1A"/>
+                </a:solidFill>
+                <a:latin typeface="Calibri"/>
+              </a:rPr>
+              <a:t>• 3-minute recorded screencast</a:t>
+            </a:r>
+          </a:p>
+          <a:p>
+            <a:pPr lvl="1">
+              <a:spcAft>
+                <a:spcPts val="800"/>
+              </a:spcAft>
+            </a:pPr>
+            <a:r>
+              <a:rPr sz="1800">
+                <a:solidFill>
+                  <a:srgbClr val="6B7280"/>
+                </a:solidFill>
+                <a:latin typeface="Calibri"/>
+              </a:rPr>
+              <a:t>– AI-Use note (required, as all semester)</a:t>
+            </a:r>
+          </a:p>
+        </p:txBody>
+      </p:sp>
+      <p:sp>
+        <p:nvSpPr>
+          <p:cNvPr id="6" name="TextBox 5"/>
+          <p:cNvSpPr txBox="1"/>
+          <p:nvPr/>
+        </p:nvSpPr>
+        <p:spPr>
+          <a:xfrm>
+            <a:off x="365760" y="6446520"/>
+            <a:ext cx="8229600" cy="365760"/>
+          </a:xfrm>
+          <a:prstGeom prst="rect">
+            <a:avLst/>
+          </a:prstGeom>
+          <a:noFill/>
+        </p:spPr>
+        <p:txBody>
+          <a:bodyPr wrap="square">
+            <a:spAutoFit/>
+          </a:bodyPr>
+          <a:lstStyle/>
+          <a:p>
+            <a:pPr algn="l"/>
+            <a:r>
+              <a:rPr sz="1000" b="0">
+                <a:solidFill>
+                  <a:srgbClr val="6B7280"/>
+                </a:solidFill>
+                <a:latin typeface="Calibri"/>
+              </a:rPr>
+              <a:t>Palomar College · CSCI 250 · Fall 2026</a:t>
+            </a:r>
+          </a:p>
+        </p:txBody>
+      </p:sp>
+      <p:sp>
+        <p:nvSpPr>
+          <p:cNvPr id="7" name="TextBox 6"/>
+          <p:cNvSpPr txBox="1"/>
+          <p:nvPr/>
+        </p:nvSpPr>
+        <p:spPr>
+          <a:xfrm>
+            <a:off x="11155680" y="6446520"/>
+            <a:ext cx="822960" cy="365760"/>
+          </a:xfrm>
+          <a:prstGeom prst="rect">
+            <a:avLst/>
+          </a:prstGeom>
+          <a:noFill/>
+        </p:spPr>
+        <p:txBody>
+          <a:bodyPr wrap="square">
+            <a:spAutoFit/>
+          </a:bodyPr>
+          <a:lstStyle/>
+          <a:p>
+            <a:pPr algn="r"/>
+            <a:r>
+              <a:rPr sz="1000" b="0">
+                <a:solidFill>
+                  <a:srgbClr val="6B7280"/>
+                </a:solidFill>
+                <a:latin typeface="Calibri"/>
+              </a:rPr>
+              <a:t>16/17</a:t>
+            </a:r>
+          </a:p>
+        </p:txBody>
+      </p:sp>
+    </p:spTree>
+  </p:cSld>
+  <p:clrMapOvr>
+    <a:masterClrMapping/>
+  </p:clrMapOvr>
+</p:sld>
+</file>
+
+<file path=ppt/slides/slide17.xml><?xml version="1.0" encoding="utf-8"?>
 <p:sld xmlns:a="http://schemas.openxmlformats.org/drawingml/2006/main" xmlns:p="http://schemas.openxmlformats.org/presentationml/2006/main" xmlns:r="http://schemas.openxmlformats.org/officeDocument/2006/relationships">
   <p:cSld>
     <p:bg>
@@ -4569,7 +5397,7 @@
                 </a:solidFill>
                 <a:latin typeface="Calibri"/>
               </a:rPr>
-              <a:t>15/15</a:t>
+              <a:t>17/17</a:t>
             </a:r>
           </a:p>
         </p:txBody>
@@ -4907,7 +5735,7 @@
                 </a:solidFill>
                 <a:latin typeface="Calibri"/>
               </a:rPr>
-              <a:t>2/15</a:t>
+              <a:t>2/17</a:t>
             </a:r>
           </a:p>
         </p:txBody>
@@ -5290,7 +6118,7 @@
                 </a:solidFill>
                 <a:latin typeface="Calibri"/>
               </a:rPr>
-              <a:t>4/15</a:t>
+              <a:t>4/17</a:t>
             </a:r>
           </a:p>
         </p:txBody>
@@ -5782,7 +6610,7 @@
                 </a:solidFill>
                 <a:latin typeface="Calibri"/>
               </a:rPr>
-              <a:t>6/15</a:t>
+              <a:t>6/17</a:t>
             </a:r>
           </a:p>
         </p:txBody>
@@ -6199,7 +7027,7 @@
                 </a:solidFill>
                 <a:latin typeface="Calibri"/>
               </a:rPr>
-              <a:t>7/15</a:t>
+              <a:t>7/17</a:t>
             </a:r>
           </a:p>
         </p:txBody>
@@ -6213,6 +7041,328 @@
 </file>
 
 <file path=ppt/slides/slide8.xml><?xml version="1.0" encoding="utf-8"?>
+<p:sld xmlns:a="http://schemas.openxmlformats.org/drawingml/2006/main" xmlns:p="http://schemas.openxmlformats.org/presentationml/2006/main" xmlns:r="http://schemas.openxmlformats.org/officeDocument/2006/relationships">
+  <p:cSld>
+    <p:bg>
+      <p:bgPr>
+        <a:solidFill>
+          <a:srgbClr val="FFFFFF"/>
+        </a:solidFill>
+        <a:effectLst/>
+      </p:bgPr>
+    </p:bg>
+    <p:spTree>
+      <p:nvGrpSpPr>
+        <p:cNvPr id="1" name=""/>
+        <p:cNvGrpSpPr/>
+        <p:nvPr/>
+      </p:nvGrpSpPr>
+      <p:grpSpPr/>
+      <p:sp>
+        <p:nvSpPr>
+          <p:cNvPr id="2" name="Rectangle 1"/>
+          <p:cNvSpPr/>
+          <p:nvPr/>
+        </p:nvSpPr>
+        <p:spPr>
+          <a:xfrm>
+            <a:off x="0" y="0"/>
+            <a:ext cx="12191695" cy="1051560"/>
+          </a:xfrm>
+          <a:prstGeom prst="rect">
+            <a:avLst/>
+          </a:prstGeom>
+          <a:solidFill>
+            <a:srgbClr val="0B1F3A"/>
+          </a:solidFill>
+          <a:ln>
+            <a:noFill/>
+          </a:ln>
+          <a:effectLst/>
+        </p:spPr>
+        <p:style>
+          <a:lnRef idx="1">
+            <a:schemeClr val="accent1"/>
+          </a:lnRef>
+          <a:fillRef idx="3">
+            <a:schemeClr val="accent1"/>
+          </a:fillRef>
+          <a:effectRef idx="2">
+            <a:schemeClr val="accent1"/>
+          </a:effectRef>
+          <a:fontRef idx="minor">
+            <a:schemeClr val="lt1"/>
+          </a:fontRef>
+        </p:style>
+        <p:txBody>
+          <a:bodyPr rtlCol="0" anchor="ctr"/>
+          <a:lstStyle/>
+          <a:p>
+            <a:pPr algn="ctr"/>
+          </a:p>
+        </p:txBody>
+      </p:sp>
+      <p:sp>
+        <p:nvSpPr>
+          <p:cNvPr id="3" name="Rectangle 2"/>
+          <p:cNvSpPr/>
+          <p:nvPr/>
+        </p:nvSpPr>
+        <p:spPr>
+          <a:xfrm>
+            <a:off x="0" y="1051560"/>
+            <a:ext cx="12191695" cy="54864"/>
+          </a:xfrm>
+          <a:prstGeom prst="rect">
+            <a:avLst/>
+          </a:prstGeom>
+          <a:solidFill>
+            <a:srgbClr val="128C8C"/>
+          </a:solidFill>
+          <a:ln>
+            <a:noFill/>
+          </a:ln>
+          <a:effectLst/>
+        </p:spPr>
+        <p:style>
+          <a:lnRef idx="1">
+            <a:schemeClr val="accent1"/>
+          </a:lnRef>
+          <a:fillRef idx="3">
+            <a:schemeClr val="accent1"/>
+          </a:fillRef>
+          <a:effectRef idx="2">
+            <a:schemeClr val="accent1"/>
+          </a:effectRef>
+          <a:fontRef idx="minor">
+            <a:schemeClr val="lt1"/>
+          </a:fontRef>
+        </p:style>
+        <p:txBody>
+          <a:bodyPr rtlCol="0" anchor="ctr"/>
+          <a:lstStyle/>
+          <a:p>
+            <a:pPr algn="ctr"/>
+          </a:p>
+        </p:txBody>
+      </p:sp>
+      <p:sp>
+        <p:nvSpPr>
+          <p:cNvPr id="4" name="TextBox 3"/>
+          <p:cNvSpPr txBox="1"/>
+          <p:nvPr/>
+        </p:nvSpPr>
+        <p:spPr>
+          <a:xfrm>
+            <a:off x="548640" y="201168"/>
+            <a:ext cx="11064240" cy="731520"/>
+          </a:xfrm>
+          <a:prstGeom prst="rect">
+            <a:avLst/>
+          </a:prstGeom>
+          <a:noFill/>
+        </p:spPr>
+        <p:txBody>
+          <a:bodyPr wrap="square" anchor="ctr">
+            <a:spAutoFit/>
+          </a:bodyPr>
+          <a:lstStyle/>
+          <a:p>
+            <a:pPr algn="l"/>
+            <a:r>
+              <a:rPr sz="2800" b="1">
+                <a:solidFill>
+                  <a:srgbClr val="FFFFFF"/>
+                </a:solidFill>
+                <a:latin typeface="Calibri"/>
+              </a:rPr>
+              <a:t>LLM-as-Judge — Three Biases to Counter</a:t>
+            </a:r>
+          </a:p>
+        </p:txBody>
+      </p:sp>
+      <p:sp>
+        <p:nvSpPr>
+          <p:cNvPr id="5" name="TextBox 4"/>
+          <p:cNvSpPr txBox="1"/>
+          <p:nvPr/>
+        </p:nvSpPr>
+        <p:spPr>
+          <a:xfrm>
+            <a:off x="731520" y="1371600"/>
+            <a:ext cx="10698480" cy="4754880"/>
+          </a:xfrm>
+          <a:prstGeom prst="rect">
+            <a:avLst/>
+          </a:prstGeom>
+          <a:noFill/>
+        </p:spPr>
+        <p:txBody>
+          <a:bodyPr wrap="square">
+            <a:spAutoFit/>
+          </a:bodyPr>
+          <a:lstStyle/>
+          <a:p>
+            <a:pPr>
+              <a:spcAft>
+                <a:spcPts val="800"/>
+              </a:spcAft>
+            </a:pPr>
+            <a:r>
+              <a:rPr sz="2000">
+                <a:solidFill>
+                  <a:srgbClr val="1A1A1A"/>
+                </a:solidFill>
+                <a:latin typeface="Calibri"/>
+              </a:rPr>
+              <a:t>• Position bias: favors the answer shown first → swap order &amp; average</a:t>
+            </a:r>
+          </a:p>
+          <a:p>
+            <a:pPr>
+              <a:spcAft>
+                <a:spcPts val="800"/>
+              </a:spcAft>
+            </a:pPr>
+            <a:r>
+              <a:rPr sz="2000">
+                <a:solidFill>
+                  <a:srgbClr val="1A1A1A"/>
+                </a:solidFill>
+                <a:latin typeface="Calibri"/>
+              </a:rPr>
+              <a:t>• Verbosity bias: over-rewards longer answers → score conciseness, cap length</a:t>
+            </a:r>
+          </a:p>
+          <a:p>
+            <a:pPr>
+              <a:spcAft>
+                <a:spcPts val="800"/>
+              </a:spcAft>
+            </a:pPr>
+            <a:r>
+              <a:rPr sz="2000">
+                <a:solidFill>
+                  <a:srgbClr val="1A1A1A"/>
+                </a:solidFill>
+                <a:latin typeface="Calibri"/>
+              </a:rPr>
+              <a:t>• Self-preference bias: rates its OWN family higher → use a cross-family judge</a:t>
+            </a:r>
+          </a:p>
+          <a:p>
+            <a:pPr lvl="1">
+              <a:spcAft>
+                <a:spcPts val="800"/>
+              </a:spcAft>
+            </a:pPr>
+            <a:r>
+              <a:rPr sz="1800">
+                <a:solidFill>
+                  <a:srgbClr val="6B7280"/>
+                </a:solidFill>
+                <a:latin typeface="Calibri"/>
+              </a:rPr>
+              <a:t>– Notebook runs TWO judges (Claude + Gemini) to expose self-preference</a:t>
+            </a:r>
+          </a:p>
+          <a:p>
+            <a:pPr lvl="1">
+              <a:spcAft>
+                <a:spcPts val="800"/>
+              </a:spcAft>
+            </a:pPr>
+            <a:r>
+              <a:rPr sz="1800">
+                <a:solidFill>
+                  <a:srgbClr val="6B7280"/>
+                </a:solidFill>
+                <a:latin typeface="Calibri"/>
+              </a:rPr>
+              <a:t>– Always spot-check the judge against human judgment</a:t>
+            </a:r>
+          </a:p>
+        </p:txBody>
+      </p:sp>
+      <p:sp>
+        <p:nvSpPr>
+          <p:cNvPr id="6" name="TextBox 5"/>
+          <p:cNvSpPr txBox="1"/>
+          <p:nvPr/>
+        </p:nvSpPr>
+        <p:spPr>
+          <a:xfrm>
+            <a:off x="365760" y="6446520"/>
+            <a:ext cx="8229600" cy="365760"/>
+          </a:xfrm>
+          <a:prstGeom prst="rect">
+            <a:avLst/>
+          </a:prstGeom>
+          <a:noFill/>
+        </p:spPr>
+        <p:txBody>
+          <a:bodyPr wrap="square">
+            <a:spAutoFit/>
+          </a:bodyPr>
+          <a:lstStyle/>
+          <a:p>
+            <a:pPr algn="l"/>
+            <a:r>
+              <a:rPr sz="1000" b="0">
+                <a:solidFill>
+                  <a:srgbClr val="6B7280"/>
+                </a:solidFill>
+                <a:latin typeface="Calibri"/>
+              </a:rPr>
+              <a:t>Palomar College · CSCI 250 · Fall 2026</a:t>
+            </a:r>
+          </a:p>
+        </p:txBody>
+      </p:sp>
+      <p:sp>
+        <p:nvSpPr>
+          <p:cNvPr id="7" name="TextBox 6"/>
+          <p:cNvSpPr txBox="1"/>
+          <p:nvPr/>
+        </p:nvSpPr>
+        <p:spPr>
+          <a:xfrm>
+            <a:off x="11155680" y="6446520"/>
+            <a:ext cx="822960" cy="365760"/>
+          </a:xfrm>
+          <a:prstGeom prst="rect">
+            <a:avLst/>
+          </a:prstGeom>
+          <a:noFill/>
+        </p:spPr>
+        <p:txBody>
+          <a:bodyPr wrap="square">
+            <a:spAutoFit/>
+          </a:bodyPr>
+          <a:lstStyle/>
+          <a:p>
+            <a:pPr algn="r"/>
+            <a:r>
+              <a:rPr sz="1000" b="0">
+                <a:solidFill>
+                  <a:srgbClr val="6B7280"/>
+                </a:solidFill>
+                <a:latin typeface="Calibri"/>
+              </a:rPr>
+              <a:t>8/17</a:t>
+            </a:r>
+          </a:p>
+        </p:txBody>
+      </p:sp>
+    </p:spTree>
+  </p:cSld>
+  <p:clrMapOvr>
+    <a:masterClrMapping/>
+  </p:clrMapOvr>
+</p:sld>
+</file>
+
+<file path=ppt/slides/slide9.xml><?xml version="1.0" encoding="utf-8"?>
 <p:sld xmlns:a="http://schemas.openxmlformats.org/drawingml/2006/main" xmlns:p="http://schemas.openxmlformats.org/presentationml/2006/main" xmlns:r="http://schemas.openxmlformats.org/officeDocument/2006/relationships">
   <p:cSld>
     <p:bg>
@@ -6261,401 +7411,6 @@
                 <a:latin typeface="Calibri"/>
               </a:rPr>
               <a:t>Building an Eval Harness</a:t>
-            </a:r>
-          </a:p>
-        </p:txBody>
-      </p:sp>
-    </p:spTree>
-  </p:cSld>
-  <p:clrMapOvr>
-    <a:masterClrMapping/>
-  </p:clrMapOvr>
-</p:sld>
-</file>
-
-<file path=ppt/slides/slide9.xml><?xml version="1.0" encoding="utf-8"?>
-<p:sld xmlns:a="http://schemas.openxmlformats.org/drawingml/2006/main" xmlns:p="http://schemas.openxmlformats.org/presentationml/2006/main" xmlns:r="http://schemas.openxmlformats.org/officeDocument/2006/relationships">
-  <p:cSld>
-    <p:bg>
-      <p:bgPr>
-        <a:solidFill>
-          <a:srgbClr val="FFFFFF"/>
-        </a:solidFill>
-        <a:effectLst/>
-      </p:bgPr>
-    </p:bg>
-    <p:spTree>
-      <p:nvGrpSpPr>
-        <p:cNvPr id="1" name=""/>
-        <p:cNvGrpSpPr/>
-        <p:nvPr/>
-      </p:nvGrpSpPr>
-      <p:grpSpPr/>
-      <p:sp>
-        <p:nvSpPr>
-          <p:cNvPr id="2" name="Rectangle 1"/>
-          <p:cNvSpPr/>
-          <p:nvPr/>
-        </p:nvSpPr>
-        <p:spPr>
-          <a:xfrm>
-            <a:off x="0" y="0"/>
-            <a:ext cx="12191695" cy="1051560"/>
-          </a:xfrm>
-          <a:prstGeom prst="rect">
-            <a:avLst/>
-          </a:prstGeom>
-          <a:solidFill>
-            <a:srgbClr val="0B1F3A"/>
-          </a:solidFill>
-          <a:ln>
-            <a:noFill/>
-          </a:ln>
-          <a:effectLst/>
-        </p:spPr>
-        <p:style>
-          <a:lnRef idx="1">
-            <a:schemeClr val="accent1"/>
-          </a:lnRef>
-          <a:fillRef idx="3">
-            <a:schemeClr val="accent1"/>
-          </a:fillRef>
-          <a:effectRef idx="2">
-            <a:schemeClr val="accent1"/>
-          </a:effectRef>
-          <a:fontRef idx="minor">
-            <a:schemeClr val="lt1"/>
-          </a:fontRef>
-        </p:style>
-        <p:txBody>
-          <a:bodyPr rtlCol="0" anchor="ctr"/>
-          <a:lstStyle/>
-          <a:p>
-            <a:pPr algn="ctr"/>
-          </a:p>
-        </p:txBody>
-      </p:sp>
-      <p:sp>
-        <p:nvSpPr>
-          <p:cNvPr id="3" name="Rectangle 2"/>
-          <p:cNvSpPr/>
-          <p:nvPr/>
-        </p:nvSpPr>
-        <p:spPr>
-          <a:xfrm>
-            <a:off x="0" y="1051560"/>
-            <a:ext cx="12191695" cy="54864"/>
-          </a:xfrm>
-          <a:prstGeom prst="rect">
-            <a:avLst/>
-          </a:prstGeom>
-          <a:solidFill>
-            <a:srgbClr val="128C8C"/>
-          </a:solidFill>
-          <a:ln>
-            <a:noFill/>
-          </a:ln>
-          <a:effectLst/>
-        </p:spPr>
-        <p:style>
-          <a:lnRef idx="1">
-            <a:schemeClr val="accent1"/>
-          </a:lnRef>
-          <a:fillRef idx="3">
-            <a:schemeClr val="accent1"/>
-          </a:fillRef>
-          <a:effectRef idx="2">
-            <a:schemeClr val="accent1"/>
-          </a:effectRef>
-          <a:fontRef idx="minor">
-            <a:schemeClr val="lt1"/>
-          </a:fontRef>
-        </p:style>
-        <p:txBody>
-          <a:bodyPr rtlCol="0" anchor="ctr"/>
-          <a:lstStyle/>
-          <a:p>
-            <a:pPr algn="ctr"/>
-          </a:p>
-        </p:txBody>
-      </p:sp>
-      <p:sp>
-        <p:nvSpPr>
-          <p:cNvPr id="4" name="TextBox 3"/>
-          <p:cNvSpPr txBox="1"/>
-          <p:nvPr/>
-        </p:nvSpPr>
-        <p:spPr>
-          <a:xfrm>
-            <a:off x="548640" y="201168"/>
-            <a:ext cx="11064240" cy="731520"/>
-          </a:xfrm>
-          <a:prstGeom prst="rect">
-            <a:avLst/>
-          </a:prstGeom>
-          <a:noFill/>
-        </p:spPr>
-        <p:txBody>
-          <a:bodyPr wrap="square" anchor="ctr">
-            <a:spAutoFit/>
-          </a:bodyPr>
-          <a:lstStyle/>
-          <a:p>
-            <a:pPr algn="l"/>
-            <a:r>
-              <a:rPr sz="2800" b="1">
-                <a:solidFill>
-                  <a:srgbClr val="FFFFFF"/>
-                </a:solidFill>
-                <a:latin typeface="Calibri"/>
-              </a:rPr>
-              <a:t>It's Just Cases + Scorer + Average</a:t>
-            </a:r>
-          </a:p>
-        </p:txBody>
-      </p:sp>
-      <p:sp>
-        <p:nvSpPr>
-          <p:cNvPr id="5" name="Rectangle 4"/>
-          <p:cNvSpPr/>
-          <p:nvPr/>
-        </p:nvSpPr>
-        <p:spPr>
-          <a:xfrm>
-            <a:off x="548640" y="1325880"/>
-            <a:ext cx="11064240" cy="4480560"/>
-          </a:xfrm>
-          <a:prstGeom prst="rect">
-            <a:avLst/>
-          </a:prstGeom>
-          <a:solidFill>
-            <a:srgbClr val="1E1E1E"/>
-          </a:solidFill>
-          <a:ln>
-            <a:noFill/>
-          </a:ln>
-          <a:effectLst/>
-        </p:spPr>
-        <p:style>
-          <a:lnRef idx="1">
-            <a:schemeClr val="accent1"/>
-          </a:lnRef>
-          <a:fillRef idx="3">
-            <a:schemeClr val="accent1"/>
-          </a:fillRef>
-          <a:effectRef idx="2">
-            <a:schemeClr val="accent1"/>
-          </a:effectRef>
-          <a:fontRef idx="minor">
-            <a:schemeClr val="lt1"/>
-          </a:fontRef>
-        </p:style>
-        <p:txBody>
-          <a:bodyPr rtlCol="0" anchor="ctr" wrap="square" lIns="182880" tIns="137160"/>
-          <a:lstStyle/>
-          <a:p>
-            <a:pPr algn="ctr"/>
-            <a:r>
-              <a:rPr sz="1500">
-                <a:solidFill>
-                  <a:srgbClr val="E6E6E6"/>
-                </a:solidFill>
-                <a:latin typeface="Consolas"/>
-              </a:rPr>
-              <a:t>test_cases = [</a:t>
-            </a:r>
-          </a:p>
-          <a:p>
-            <a:r>
-              <a:rPr sz="1500">
-                <a:solidFill>
-                  <a:srgbClr val="E6E6E6"/>
-                </a:solidFill>
-                <a:latin typeface="Consolas"/>
-              </a:rPr>
-              <a:t>    {'input': 'Capital of France?', 'expected': 'Paris'},</a:t>
-            </a:r>
-          </a:p>
-          <a:p>
-            <a:r>
-              <a:rPr sz="1500">
-                <a:solidFill>
-                  <a:srgbClr val="E6E6E6"/>
-                </a:solidFill>
-                <a:latin typeface="Consolas"/>
-              </a:rPr>
-              <a:t>    {'input': '2 + 2?',            'expected': '4'},</a:t>
-            </a:r>
-          </a:p>
-          <a:p>
-            <a:r>
-              <a:rPr sz="1500">
-                <a:solidFill>
-                  <a:srgbClr val="E6E6E6"/>
-                </a:solidFill>
-                <a:latin typeface="Consolas"/>
-              </a:rPr>
-              <a:t>]</a:t>
-            </a:r>
-          </a:p>
-          <a:p>
-            <a:r>
-              <a:rPr sz="1500">
-                <a:solidFill>
-                  <a:srgbClr val="E6E6E6"/>
-                </a:solidFill>
-                <a:latin typeface="Consolas"/>
-              </a:rPr>
-              <a:t> </a:t>
-            </a:r>
-          </a:p>
-          <a:p>
-            <a:r>
-              <a:rPr sz="1500">
-                <a:solidFill>
-                  <a:srgbClr val="E6E6E6"/>
-                </a:solidFill>
-                <a:latin typeface="Consolas"/>
-              </a:rPr>
-              <a:t>def run_eval(system_fn, score_fn):</a:t>
-            </a:r>
-          </a:p>
-          <a:p>
-            <a:r>
-              <a:rPr sz="1500">
-                <a:solidFill>
-                  <a:srgbClr val="E6E6E6"/>
-                </a:solidFill>
-                <a:latin typeface="Consolas"/>
-              </a:rPr>
-              <a:t>    scores = [score_fn(system_fn(tc['input']), tc['expected'])</a:t>
-            </a:r>
-          </a:p>
-          <a:p>
-            <a:r>
-              <a:rPr sz="1500">
-                <a:solidFill>
-                  <a:srgbClr val="E6E6E6"/>
-                </a:solidFill>
-                <a:latin typeface="Consolas"/>
-              </a:rPr>
-              <a:t>              for tc in test_cases]</a:t>
-            </a:r>
-          </a:p>
-          <a:p>
-            <a:r>
-              <a:rPr sz="1500">
-                <a:solidFill>
-                  <a:srgbClr val="E6E6E6"/>
-                </a:solidFill>
-                <a:latin typeface="Consolas"/>
-              </a:rPr>
-              <a:t>    return sum(scores) / len(scores)   # average score</a:t>
-            </a:r>
-          </a:p>
-        </p:txBody>
-      </p:sp>
-      <p:sp>
-        <p:nvSpPr>
-          <p:cNvPr id="6" name="TextBox 5"/>
-          <p:cNvSpPr txBox="1"/>
-          <p:nvPr/>
-        </p:nvSpPr>
-        <p:spPr>
-          <a:xfrm>
-            <a:off x="548640" y="5897880"/>
-            <a:ext cx="10515600" cy="457200"/>
-          </a:xfrm>
-          <a:prstGeom prst="rect">
-            <a:avLst/>
-          </a:prstGeom>
-          <a:noFill/>
-        </p:spPr>
-        <p:txBody>
-          <a:bodyPr wrap="square">
-            <a:spAutoFit/>
-          </a:bodyPr>
-          <a:lstStyle/>
-          <a:p>
-            <a:pPr algn="l"/>
-            <a:r>
-              <a:rPr sz="1400" b="0">
-                <a:solidFill>
-                  <a:srgbClr val="6B7280"/>
-                </a:solidFill>
-                <a:latin typeface="Calibri"/>
-              </a:rPr>
-              <a:t>Keep it in version control; full LLM-judge version in the notebook</a:t>
-            </a:r>
-          </a:p>
-        </p:txBody>
-      </p:sp>
-      <p:sp>
-        <p:nvSpPr>
-          <p:cNvPr id="7" name="TextBox 6"/>
-          <p:cNvSpPr txBox="1"/>
-          <p:nvPr/>
-        </p:nvSpPr>
-        <p:spPr>
-          <a:xfrm>
-            <a:off x="365760" y="6446520"/>
-            <a:ext cx="8229600" cy="365760"/>
-          </a:xfrm>
-          <a:prstGeom prst="rect">
-            <a:avLst/>
-          </a:prstGeom>
-          <a:noFill/>
-        </p:spPr>
-        <p:txBody>
-          <a:bodyPr wrap="square">
-            <a:spAutoFit/>
-          </a:bodyPr>
-          <a:lstStyle/>
-          <a:p>
-            <a:pPr algn="l"/>
-            <a:r>
-              <a:rPr sz="1000" b="0">
-                <a:solidFill>
-                  <a:srgbClr val="6B7280"/>
-                </a:solidFill>
-                <a:latin typeface="Calibri"/>
-              </a:rPr>
-              <a:t>Palomar College · CSCI 250 · Fall 2026</a:t>
-            </a:r>
-          </a:p>
-        </p:txBody>
-      </p:sp>
-      <p:sp>
-        <p:nvSpPr>
-          <p:cNvPr id="8" name="TextBox 7"/>
-          <p:cNvSpPr txBox="1"/>
-          <p:nvPr/>
-        </p:nvSpPr>
-        <p:spPr>
-          <a:xfrm>
-            <a:off x="11155680" y="6446520"/>
-            <a:ext cx="822960" cy="365760"/>
-          </a:xfrm>
-          <a:prstGeom prst="rect">
-            <a:avLst/>
-          </a:prstGeom>
-          <a:noFill/>
-        </p:spPr>
-        <p:txBody>
-          <a:bodyPr wrap="square">
-            <a:spAutoFit/>
-          </a:bodyPr>
-          <a:lstStyle/>
-          <a:p>
-            <a:pPr algn="r"/>
-            <a:r>
-              <a:rPr sz="1000" b="0">
-                <a:solidFill>
-                  <a:srgbClr val="6B7280"/>
-                </a:solidFill>
-                <a:latin typeface="Calibri"/>
-              </a:rPr>
-              <a:t>9/15</a:t>
             </a:r>
           </a:p>
         </p:txBody>
